--- a/deploy/LANDIS-II-SiteV3_0/Inter/LANDIS-II-Site User Guide_Presentation.pptx
+++ b/deploy/LANDIS-II-SiteV3_0/Inter/LANDIS-II-Site User Guide_Presentation.pptx
@@ -5,8 +5,10 @@
     <p:sldMasterId id="2147483648" r:id="rId1"/>
   </p:sldMasterIdLst>
   <p:sldIdLst>
-    <p:sldId id="256" r:id="rId2"/>
-    <p:sldId id="257" r:id="rId3"/>
+    <p:sldId id="257" r:id="rId2"/>
+    <p:sldId id="256" r:id="rId3"/>
+    <p:sldId id="259" r:id="rId4"/>
+    <p:sldId id="258" r:id="rId5"/>
   </p:sldIdLst>
   <p:sldSz cx="12192000" cy="6858000"/>
   <p:notesSz cx="6858000" cy="9144000"/>
@@ -105,6 +107,11 @@
       </a:defRPr>
     </a:lvl9pPr>
   </p:defaultTextStyle>
+  <p:extLst>
+    <p:ext uri="{EFAFB233-063F-42B5-8137-9DF3F51BA10A}">
+      <p15:sldGuideLst xmlns:p15="http://schemas.microsoft.com/office/powerpoint/2012/main"/>
+    </p:ext>
+  </p:extLst>
 </p:presentation>
 </file>
 
@@ -255,7 +262,7 @@
           <a:p>
             <a:fld id="{780C659C-950C-4219-97A5-5FA1345B82CF}" type="datetimeFigureOut">
               <a:rPr lang="en-US" smtClean="0"/>
-              <a:t>3/20/2025</a:t>
+              <a:t>4/29/2026</a:t>
             </a:fld>
             <a:endParaRPr lang="en-US"/>
           </a:p>
@@ -453,7 +460,7 @@
           <a:p>
             <a:fld id="{780C659C-950C-4219-97A5-5FA1345B82CF}" type="datetimeFigureOut">
               <a:rPr lang="en-US" smtClean="0"/>
-              <a:t>3/20/2025</a:t>
+              <a:t>4/29/2026</a:t>
             </a:fld>
             <a:endParaRPr lang="en-US"/>
           </a:p>
@@ -661,7 +668,7 @@
           <a:p>
             <a:fld id="{780C659C-950C-4219-97A5-5FA1345B82CF}" type="datetimeFigureOut">
               <a:rPr lang="en-US" smtClean="0"/>
-              <a:t>3/20/2025</a:t>
+              <a:t>4/29/2026</a:t>
             </a:fld>
             <a:endParaRPr lang="en-US"/>
           </a:p>
@@ -859,7 +866,7 @@
           <a:p>
             <a:fld id="{780C659C-950C-4219-97A5-5FA1345B82CF}" type="datetimeFigureOut">
               <a:rPr lang="en-US" smtClean="0"/>
-              <a:t>3/20/2025</a:t>
+              <a:t>4/29/2026</a:t>
             </a:fld>
             <a:endParaRPr lang="en-US"/>
           </a:p>
@@ -1134,7 +1141,7 @@
           <a:p>
             <a:fld id="{780C659C-950C-4219-97A5-5FA1345B82CF}" type="datetimeFigureOut">
               <a:rPr lang="en-US" smtClean="0"/>
-              <a:t>3/20/2025</a:t>
+              <a:t>4/29/2026</a:t>
             </a:fld>
             <a:endParaRPr lang="en-US"/>
           </a:p>
@@ -1399,7 +1406,7 @@
           <a:p>
             <a:fld id="{780C659C-950C-4219-97A5-5FA1345B82CF}" type="datetimeFigureOut">
               <a:rPr lang="en-US" smtClean="0"/>
-              <a:t>3/20/2025</a:t>
+              <a:t>4/29/2026</a:t>
             </a:fld>
             <a:endParaRPr lang="en-US"/>
           </a:p>
@@ -1811,7 +1818,7 @@
           <a:p>
             <a:fld id="{780C659C-950C-4219-97A5-5FA1345B82CF}" type="datetimeFigureOut">
               <a:rPr lang="en-US" smtClean="0"/>
-              <a:t>3/20/2025</a:t>
+              <a:t>4/29/2026</a:t>
             </a:fld>
             <a:endParaRPr lang="en-US"/>
           </a:p>
@@ -1952,7 +1959,7 @@
           <a:p>
             <a:fld id="{780C659C-950C-4219-97A5-5FA1345B82CF}" type="datetimeFigureOut">
               <a:rPr lang="en-US" smtClean="0"/>
-              <a:t>3/20/2025</a:t>
+              <a:t>4/29/2026</a:t>
             </a:fld>
             <a:endParaRPr lang="en-US"/>
           </a:p>
@@ -2065,7 +2072,7 @@
           <a:p>
             <a:fld id="{780C659C-950C-4219-97A5-5FA1345B82CF}" type="datetimeFigureOut">
               <a:rPr lang="en-US" smtClean="0"/>
-              <a:t>3/20/2025</a:t>
+              <a:t>4/29/2026</a:t>
             </a:fld>
             <a:endParaRPr lang="en-US"/>
           </a:p>
@@ -2376,7 +2383,7 @@
           <a:p>
             <a:fld id="{780C659C-950C-4219-97A5-5FA1345B82CF}" type="datetimeFigureOut">
               <a:rPr lang="en-US" smtClean="0"/>
-              <a:t>3/20/2025</a:t>
+              <a:t>4/29/2026</a:t>
             </a:fld>
             <a:endParaRPr lang="en-US"/>
           </a:p>
@@ -2664,7 +2671,7 @@
           <a:p>
             <a:fld id="{780C659C-950C-4219-97A5-5FA1345B82CF}" type="datetimeFigureOut">
               <a:rPr lang="en-US" smtClean="0"/>
-              <a:t>3/20/2025</a:t>
+              <a:t>4/29/2026</a:t>
             </a:fld>
             <a:endParaRPr lang="en-US"/>
           </a:p>
@@ -2905,7 +2912,7 @@
           <a:p>
             <a:fld id="{780C659C-950C-4219-97A5-5FA1345B82CF}" type="datetimeFigureOut">
               <a:rPr lang="en-US" smtClean="0"/>
-              <a:t>3/20/2025</a:t>
+              <a:t>4/29/2026</a:t>
             </a:fld>
             <a:endParaRPr lang="en-US"/>
           </a:p>
@@ -3310,6 +3317,81 @@
   <p:cSld>
     <p:spTree>
       <p:nvGrpSpPr>
+        <p:cNvPr id="1" name="">
+          <a:extLst>
+            <a:ext uri="{FF2B5EF4-FFF2-40B4-BE49-F238E27FC236}">
+              <a16:creationId xmlns:a16="http://schemas.microsoft.com/office/drawing/2014/main" id="{6EAFC18D-5D20-CFBF-CB06-4EC23E9EEC76}"/>
+            </a:ext>
+          </a:extLst>
+        </p:cNvPr>
+        <p:cNvGrpSpPr/>
+        <p:nvPr/>
+      </p:nvGrpSpPr>
+      <p:grpSpPr>
+        <a:xfrm>
+          <a:off x="0" y="0"/>
+          <a:ext cx="0" cy="0"/>
+          <a:chOff x="0" y="0"/>
+          <a:chExt cx="0" cy="0"/>
+        </a:xfrm>
+      </p:grpSpPr>
+      <p:pic>
+        <p:nvPicPr>
+          <p:cNvPr id="2" name="Picture 1">
+            <a:extLst>
+              <a:ext uri="{FF2B5EF4-FFF2-40B4-BE49-F238E27FC236}">
+                <a16:creationId xmlns:a16="http://schemas.microsoft.com/office/drawing/2014/main" id="{FF93CB39-0D4A-8A58-E23F-26BDED2E8311}"/>
+              </a:ext>
+            </a:extLst>
+          </p:cNvPr>
+          <p:cNvPicPr>
+            <a:picLocks noChangeAspect="1"/>
+          </p:cNvPicPr>
+          <p:nvPr/>
+        </p:nvPicPr>
+        <p:blipFill rotWithShape="1">
+          <a:blip r:embed="rId2"/>
+          <a:srcRect l="835" r="845" b="1834"/>
+          <a:stretch>
+            <a:fillRect/>
+          </a:stretch>
+        </p:blipFill>
+        <p:spPr bwMode="auto">
+          <a:xfrm>
+            <a:off x="2328672" y="224538"/>
+            <a:ext cx="7149003" cy="6408924"/>
+          </a:xfrm>
+          <a:prstGeom prst="rect">
+            <a:avLst/>
+          </a:prstGeom>
+          <a:ln>
+            <a:noFill/>
+          </a:ln>
+          <a:extLst>
+            <a:ext uri="{53640926-AAD7-44D8-BBD7-CCE9431645EC}">
+              <a14:shadowObscured xmlns:a14="http://schemas.microsoft.com/office/drawing/2010/main"/>
+            </a:ext>
+          </a:extLst>
+        </p:spPr>
+      </p:pic>
+    </p:spTree>
+    <p:extLst>
+      <p:ext uri="{BB962C8B-B14F-4D97-AF65-F5344CB8AC3E}">
+        <p14:creationId xmlns:p14="http://schemas.microsoft.com/office/powerpoint/2010/main" val="599809854"/>
+      </p:ext>
+    </p:extLst>
+  </p:cSld>
+  <p:clrMapOvr>
+    <a:masterClrMapping/>
+  </p:clrMapOvr>
+</p:sld>
+</file>
+
+<file path=ppt/slides/slide2.xml><?xml version="1.0" encoding="utf-8"?>
+<p:sld xmlns:a="http://schemas.openxmlformats.org/drawingml/2006/main" xmlns:r="http://schemas.openxmlformats.org/officeDocument/2006/relationships" xmlns:p="http://schemas.openxmlformats.org/presentationml/2006/main">
+  <p:cSld>
+    <p:spTree>
+      <p:nvGrpSpPr>
         <p:cNvPr id="1" name=""/>
         <p:cNvGrpSpPr/>
         <p:nvPr/>
@@ -3324,10 +3406,10 @@
       </p:grpSpPr>
       <p:grpSp>
         <p:nvGrpSpPr>
-          <p:cNvPr id="13" name="Group 12">
-            <a:extLst>
-              <a:ext uri="{FF2B5EF4-FFF2-40B4-BE49-F238E27FC236}">
-                <a16:creationId xmlns:a16="http://schemas.microsoft.com/office/drawing/2014/main" id="{A98A4CFD-2C81-4003-CBAB-E4B1B772A7A5}"/>
+          <p:cNvPr id="3" name="Group 2">
+            <a:extLst>
+              <a:ext uri="{FF2B5EF4-FFF2-40B4-BE49-F238E27FC236}">
+                <a16:creationId xmlns:a16="http://schemas.microsoft.com/office/drawing/2014/main" id="{E38A167C-3DDF-113D-5556-4B2CDFEE24FA}"/>
               </a:ext>
             </a:extLst>
           </p:cNvPr>
@@ -3336,18 +3418,18 @@
         </p:nvGrpSpPr>
         <p:grpSpPr>
           <a:xfrm>
-            <a:off x="2090056" y="151243"/>
-            <a:ext cx="7427270" cy="6555514"/>
-            <a:chOff x="2090056" y="151243"/>
-            <a:chExt cx="7427270" cy="6555514"/>
+            <a:off x="2090056" y="212940"/>
+            <a:ext cx="7149003" cy="6408924"/>
+            <a:chOff x="2090056" y="212940"/>
+            <a:chExt cx="7149003" cy="6408924"/>
           </a:xfrm>
         </p:grpSpPr>
         <p:pic>
           <p:nvPicPr>
-            <p:cNvPr id="4" name="Picture 3" descr="A screenshot of a computer&#10;&#10;AI-generated content may be incorrect.">
+            <p:cNvPr id="2" name="Picture 1">
               <a:extLst>
                 <a:ext uri="{FF2B5EF4-FFF2-40B4-BE49-F238E27FC236}">
-                  <a16:creationId xmlns:a16="http://schemas.microsoft.com/office/drawing/2014/main" id="{DF1001DD-8199-422C-F035-37AF9B0B5DBA}"/>
+                  <a16:creationId xmlns:a16="http://schemas.microsoft.com/office/drawing/2014/main" id="{402AAA98-1F81-B3CE-7C99-0B5FAD4C4512}"/>
                 </a:ext>
               </a:extLst>
             </p:cNvPr>
@@ -3356,16 +3438,17 @@
             </p:cNvPicPr>
             <p:nvPr/>
           </p:nvPicPr>
-          <p:blipFill>
+          <p:blipFill rotWithShape="1">
             <a:blip r:embed="rId2"/>
+            <a:srcRect l="835" r="845" b="1834"/>
             <a:stretch>
               <a:fillRect/>
             </a:stretch>
           </p:blipFill>
-          <p:spPr>
+          <p:spPr bwMode="auto">
             <a:xfrm>
-              <a:off x="2165130" y="151243"/>
-              <a:ext cx="7256449" cy="6555514"/>
+              <a:off x="2090056" y="212940"/>
+              <a:ext cx="7149003" cy="6408924"/>
             </a:xfrm>
             <a:prstGeom prst="rect">
               <a:avLst/>
@@ -3373,6 +3456,11 @@
             <a:ln>
               <a:noFill/>
             </a:ln>
+            <a:extLst>
+              <a:ext uri="{53640926-AAD7-44D8-BBD7-CCE9431645EC}">
+                <a14:shadowObscured xmlns:a14="http://schemas.microsoft.com/office/drawing/2010/main"/>
+              </a:ext>
+            </a:extLst>
           </p:spPr>
         </p:pic>
         <p:sp>
@@ -3390,7 +3478,7 @@
           <p:spPr>
             <a:xfrm>
               <a:off x="2090056" y="388884"/>
-              <a:ext cx="7427270" cy="173824"/>
+              <a:ext cx="7149003" cy="163776"/>
             </a:xfrm>
             <a:prstGeom prst="rect">
               <a:avLst/>
@@ -3442,7 +3530,7 @@
           <p:spPr>
             <a:xfrm>
               <a:off x="2090056" y="592852"/>
-              <a:ext cx="7427270" cy="150726"/>
+              <a:ext cx="7149003" cy="130631"/>
             </a:xfrm>
             <a:prstGeom prst="rect">
               <a:avLst/>
@@ -3494,7 +3582,7 @@
           <p:spPr>
             <a:xfrm>
               <a:off x="2090056" y="763675"/>
-              <a:ext cx="7427270" cy="3526971"/>
+              <a:ext cx="7149003" cy="3735173"/>
             </a:xfrm>
             <a:prstGeom prst="rect">
               <a:avLst/>
@@ -3545,8 +3633,8 @@
           </p:nvSpPr>
           <p:spPr>
             <a:xfrm>
-              <a:off x="2090056" y="4330838"/>
-              <a:ext cx="5476353" cy="2291026"/>
+              <a:off x="2090057" y="4498848"/>
+              <a:ext cx="5115416" cy="2123016"/>
             </a:xfrm>
             <a:prstGeom prst="rect">
               <a:avLst/>
@@ -3597,7 +3685,7 @@
 </p:sld>
 </file>
 
-<file path=ppt/slides/slide2.xml><?xml version="1.0" encoding="utf-8"?>
+<file path=ppt/slides/slide3.xml><?xml version="1.0" encoding="utf-8"?>
 <p:sld xmlns:a="http://schemas.openxmlformats.org/drawingml/2006/main" xmlns:r="http://schemas.openxmlformats.org/officeDocument/2006/relationships" xmlns:p="http://schemas.openxmlformats.org/presentationml/2006/main">
   <p:cSld>
     <p:spTree>
@@ -3605,7 +3693,7 @@
         <p:cNvPr id="1" name="">
           <a:extLst>
             <a:ext uri="{FF2B5EF4-FFF2-40B4-BE49-F238E27FC236}">
-              <a16:creationId xmlns:a16="http://schemas.microsoft.com/office/drawing/2014/main" id="{6EAFC18D-5D20-CFBF-CB06-4EC23E9EEC76}"/>
+              <a16:creationId xmlns:a16="http://schemas.microsoft.com/office/drawing/2014/main" id="{AF86A161-1BBD-8B4F-4152-3FEEA69F98B2}"/>
             </a:ext>
           </a:extLst>
         </p:cNvPr>
@@ -3622,10 +3710,10 @@
       </p:grpSpPr>
       <p:pic>
         <p:nvPicPr>
-          <p:cNvPr id="4" name="Picture 3" descr="A screenshot of a computer&#10;&#10;AI-generated content may be incorrect.">
-            <a:extLst>
-              <a:ext uri="{FF2B5EF4-FFF2-40B4-BE49-F238E27FC236}">
-                <a16:creationId xmlns:a16="http://schemas.microsoft.com/office/drawing/2014/main" id="{9247122A-AE90-1FDD-59F4-BC217420BD33}"/>
+          <p:cNvPr id="4" name="Picture 3">
+            <a:extLst>
+              <a:ext uri="{FF2B5EF4-FFF2-40B4-BE49-F238E27FC236}">
+                <a16:creationId xmlns:a16="http://schemas.microsoft.com/office/drawing/2014/main" id="{04F00592-5251-3DB9-5152-8E27CBD5DE48}"/>
               </a:ext>
             </a:extLst>
           </p:cNvPr>
@@ -3636,27 +3724,320 @@
         </p:nvPicPr>
         <p:blipFill>
           <a:blip r:embed="rId2"/>
+          <a:srcRect l="748" r="1553" b="3289"/>
           <a:stretch>
             <a:fillRect/>
           </a:stretch>
         </p:blipFill>
         <p:spPr>
           <a:xfrm>
-            <a:off x="2165130" y="151243"/>
-            <a:ext cx="7256449" cy="6555514"/>
+            <a:off x="2145792" y="112776"/>
+            <a:ext cx="7400544" cy="6632448"/>
           </a:xfrm>
           <a:prstGeom prst="rect">
             <a:avLst/>
           </a:prstGeom>
-          <a:ln>
-            <a:noFill/>
-          </a:ln>
         </p:spPr>
       </p:pic>
     </p:spTree>
     <p:extLst>
       <p:ext uri="{BB962C8B-B14F-4D97-AF65-F5344CB8AC3E}">
-        <p14:creationId xmlns:p14="http://schemas.microsoft.com/office/powerpoint/2010/main" val="599809854"/>
+        <p14:creationId xmlns:p14="http://schemas.microsoft.com/office/powerpoint/2010/main" val="323449061"/>
+      </p:ext>
+    </p:extLst>
+  </p:cSld>
+  <p:clrMapOvr>
+    <a:masterClrMapping/>
+  </p:clrMapOvr>
+</p:sld>
+</file>
+
+<file path=ppt/slides/slide4.xml><?xml version="1.0" encoding="utf-8"?>
+<p:sld xmlns:a="http://schemas.openxmlformats.org/drawingml/2006/main" xmlns:r="http://schemas.openxmlformats.org/officeDocument/2006/relationships" xmlns:p="http://schemas.openxmlformats.org/presentationml/2006/main">
+  <p:cSld>
+    <p:spTree>
+      <p:nvGrpSpPr>
+        <p:cNvPr id="1" name="">
+          <a:extLst>
+            <a:ext uri="{FF2B5EF4-FFF2-40B4-BE49-F238E27FC236}">
+              <a16:creationId xmlns:a16="http://schemas.microsoft.com/office/drawing/2014/main" id="{1FECB602-9DBC-049D-2A88-9D4D42DEAD6E}"/>
+            </a:ext>
+          </a:extLst>
+        </p:cNvPr>
+        <p:cNvGrpSpPr/>
+        <p:nvPr/>
+      </p:nvGrpSpPr>
+      <p:grpSpPr>
+        <a:xfrm>
+          <a:off x="0" y="0"/>
+          <a:ext cx="0" cy="0"/>
+          <a:chOff x="0" y="0"/>
+          <a:chExt cx="0" cy="0"/>
+        </a:xfrm>
+      </p:grpSpPr>
+      <p:grpSp>
+        <p:nvGrpSpPr>
+          <p:cNvPr id="16" name="Group 15">
+            <a:extLst>
+              <a:ext uri="{FF2B5EF4-FFF2-40B4-BE49-F238E27FC236}">
+                <a16:creationId xmlns:a16="http://schemas.microsoft.com/office/drawing/2014/main" id="{85591B07-5052-FCA9-F785-9C33A1866DA6}"/>
+              </a:ext>
+            </a:extLst>
+          </p:cNvPr>
+          <p:cNvGrpSpPr/>
+          <p:nvPr/>
+        </p:nvGrpSpPr>
+        <p:grpSpPr>
+          <a:xfrm>
+            <a:off x="2090056" y="197833"/>
+            <a:ext cx="7149004" cy="6462334"/>
+            <a:chOff x="2090056" y="197833"/>
+            <a:chExt cx="7149004" cy="6462334"/>
+          </a:xfrm>
+        </p:grpSpPr>
+        <p:pic>
+          <p:nvPicPr>
+            <p:cNvPr id="15" name="Picture 14">
+              <a:extLst>
+                <a:ext uri="{FF2B5EF4-FFF2-40B4-BE49-F238E27FC236}">
+                  <a16:creationId xmlns:a16="http://schemas.microsoft.com/office/drawing/2014/main" id="{D2C5B4CD-1527-384A-C3E1-90899D07E093}"/>
+                </a:ext>
+              </a:extLst>
+            </p:cNvPr>
+            <p:cNvPicPr>
+              <a:picLocks noChangeAspect="1"/>
+            </p:cNvPicPr>
+            <p:nvPr/>
+          </p:nvPicPr>
+          <p:blipFill>
+            <a:blip r:embed="rId2"/>
+            <a:stretch>
+              <a:fillRect/>
+            </a:stretch>
+          </p:blipFill>
+          <p:spPr>
+            <a:xfrm>
+              <a:off x="2090056" y="197833"/>
+              <a:ext cx="7149004" cy="6407015"/>
+            </a:xfrm>
+            <a:prstGeom prst="rect">
+              <a:avLst/>
+            </a:prstGeom>
+          </p:spPr>
+        </p:pic>
+        <p:sp>
+          <p:nvSpPr>
+            <p:cNvPr id="5" name="Rectangle 4">
+              <a:extLst>
+                <a:ext uri="{FF2B5EF4-FFF2-40B4-BE49-F238E27FC236}">
+                  <a16:creationId xmlns:a16="http://schemas.microsoft.com/office/drawing/2014/main" id="{C8D68D7D-B3BC-F6AF-1E64-1CE8C359EE15}"/>
+                </a:ext>
+              </a:extLst>
+            </p:cNvPr>
+            <p:cNvSpPr/>
+            <p:nvPr/>
+          </p:nvSpPr>
+          <p:spPr>
+            <a:xfrm>
+              <a:off x="2090056" y="401076"/>
+              <a:ext cx="7149003" cy="163776"/>
+            </a:xfrm>
+            <a:prstGeom prst="rect">
+              <a:avLst/>
+            </a:prstGeom>
+            <a:noFill/>
+            <a:ln>
+              <a:solidFill>
+                <a:srgbClr val="C00000"/>
+              </a:solidFill>
+            </a:ln>
+          </p:spPr>
+          <p:style>
+            <a:lnRef idx="2">
+              <a:schemeClr val="accent1">
+                <a:shade val="15000"/>
+              </a:schemeClr>
+            </a:lnRef>
+            <a:fillRef idx="1">
+              <a:schemeClr val="accent1"/>
+            </a:fillRef>
+            <a:effectRef idx="0">
+              <a:schemeClr val="accent1"/>
+            </a:effectRef>
+            <a:fontRef idx="minor">
+              <a:schemeClr val="lt1"/>
+            </a:fontRef>
+          </p:style>
+          <p:txBody>
+            <a:bodyPr rtlCol="0" anchor="ctr"/>
+            <a:lstStyle/>
+            <a:p>
+              <a:pPr algn="ctr"/>
+              <a:endParaRPr lang="en-US"/>
+            </a:p>
+          </p:txBody>
+        </p:sp>
+        <p:sp>
+          <p:nvSpPr>
+            <p:cNvPr id="9" name="Rectangle 8">
+              <a:extLst>
+                <a:ext uri="{FF2B5EF4-FFF2-40B4-BE49-F238E27FC236}">
+                  <a16:creationId xmlns:a16="http://schemas.microsoft.com/office/drawing/2014/main" id="{B878274F-1825-C044-D73E-9740DFB8BB2F}"/>
+                </a:ext>
+              </a:extLst>
+            </p:cNvPr>
+            <p:cNvSpPr/>
+            <p:nvPr/>
+          </p:nvSpPr>
+          <p:spPr>
+            <a:xfrm>
+              <a:off x="2090056" y="609600"/>
+              <a:ext cx="7149003" cy="202843"/>
+            </a:xfrm>
+            <a:prstGeom prst="rect">
+              <a:avLst/>
+            </a:prstGeom>
+            <a:noFill/>
+            <a:ln>
+              <a:solidFill>
+                <a:srgbClr val="FFC000"/>
+              </a:solidFill>
+            </a:ln>
+          </p:spPr>
+          <p:style>
+            <a:lnRef idx="2">
+              <a:schemeClr val="accent1">
+                <a:shade val="15000"/>
+              </a:schemeClr>
+            </a:lnRef>
+            <a:fillRef idx="1">
+              <a:schemeClr val="accent1"/>
+            </a:fillRef>
+            <a:effectRef idx="0">
+              <a:schemeClr val="accent1"/>
+            </a:effectRef>
+            <a:fontRef idx="minor">
+              <a:schemeClr val="lt1"/>
+            </a:fontRef>
+          </p:style>
+          <p:txBody>
+            <a:bodyPr rtlCol="0" anchor="ctr"/>
+            <a:lstStyle/>
+            <a:p>
+              <a:pPr algn="ctr"/>
+              <a:endParaRPr lang="en-US"/>
+            </a:p>
+          </p:txBody>
+        </p:sp>
+        <p:sp>
+          <p:nvSpPr>
+            <p:cNvPr id="10" name="Rectangle 9">
+              <a:extLst>
+                <a:ext uri="{FF2B5EF4-FFF2-40B4-BE49-F238E27FC236}">
+                  <a16:creationId xmlns:a16="http://schemas.microsoft.com/office/drawing/2014/main" id="{B1F0AFD1-34A2-916F-DBD0-366395CE02BA}"/>
+                </a:ext>
+              </a:extLst>
+            </p:cNvPr>
+            <p:cNvSpPr/>
+            <p:nvPr/>
+          </p:nvSpPr>
+          <p:spPr>
+            <a:xfrm>
+              <a:off x="2090056" y="836827"/>
+              <a:ext cx="7149003" cy="3735173"/>
+            </a:xfrm>
+            <a:prstGeom prst="rect">
+              <a:avLst/>
+            </a:prstGeom>
+            <a:noFill/>
+            <a:ln>
+              <a:solidFill>
+                <a:srgbClr val="00B050"/>
+              </a:solidFill>
+            </a:ln>
+          </p:spPr>
+          <p:style>
+            <a:lnRef idx="2">
+              <a:schemeClr val="accent1">
+                <a:shade val="15000"/>
+              </a:schemeClr>
+            </a:lnRef>
+            <a:fillRef idx="1">
+              <a:schemeClr val="accent1"/>
+            </a:fillRef>
+            <a:effectRef idx="0">
+              <a:schemeClr val="accent1"/>
+            </a:effectRef>
+            <a:fontRef idx="minor">
+              <a:schemeClr val="lt1"/>
+            </a:fontRef>
+          </p:style>
+          <p:txBody>
+            <a:bodyPr rtlCol="0" anchor="ctr"/>
+            <a:lstStyle/>
+            <a:p>
+              <a:pPr algn="ctr"/>
+              <a:endParaRPr lang="en-US"/>
+            </a:p>
+          </p:txBody>
+        </p:sp>
+        <p:sp>
+          <p:nvSpPr>
+            <p:cNvPr id="11" name="Rectangle 10">
+              <a:extLst>
+                <a:ext uri="{FF2B5EF4-FFF2-40B4-BE49-F238E27FC236}">
+                  <a16:creationId xmlns:a16="http://schemas.microsoft.com/office/drawing/2014/main" id="{9F6320E2-52C0-4AAF-6519-0D72BEB8334C}"/>
+                </a:ext>
+              </a:extLst>
+            </p:cNvPr>
+            <p:cNvSpPr/>
+            <p:nvPr/>
+          </p:nvSpPr>
+          <p:spPr>
+            <a:xfrm>
+              <a:off x="2090056" y="4572000"/>
+              <a:ext cx="5322679" cy="2088167"/>
+            </a:xfrm>
+            <a:prstGeom prst="rect">
+              <a:avLst/>
+            </a:prstGeom>
+            <a:noFill/>
+            <a:ln>
+              <a:solidFill>
+                <a:srgbClr val="002060"/>
+              </a:solidFill>
+            </a:ln>
+          </p:spPr>
+          <p:style>
+            <a:lnRef idx="2">
+              <a:schemeClr val="accent1">
+                <a:shade val="15000"/>
+              </a:schemeClr>
+            </a:lnRef>
+            <a:fillRef idx="1">
+              <a:schemeClr val="accent1"/>
+            </a:fillRef>
+            <a:effectRef idx="0">
+              <a:schemeClr val="accent1"/>
+            </a:effectRef>
+            <a:fontRef idx="minor">
+              <a:schemeClr val="lt1"/>
+            </a:fontRef>
+          </p:style>
+          <p:txBody>
+            <a:bodyPr rtlCol="0" anchor="ctr"/>
+            <a:lstStyle/>
+            <a:p>
+              <a:pPr algn="ctr"/>
+              <a:endParaRPr lang="en-US"/>
+            </a:p>
+          </p:txBody>
+        </p:sp>
+      </p:grpSp>
+    </p:spTree>
+    <p:extLst>
+      <p:ext uri="{BB962C8B-B14F-4D97-AF65-F5344CB8AC3E}">
+        <p14:creationId xmlns:p14="http://schemas.microsoft.com/office/powerpoint/2010/main" val="2415366891"/>
       </p:ext>
     </p:extLst>
   </p:cSld>

--- a/deploy/LANDIS-II-SiteV3_0/Inter/LANDIS-II-Site User Guide_Presentation.pptx
+++ b/deploy/LANDIS-II-SiteV3_0/Inter/LANDIS-II-Site User Guide_Presentation.pptx
@@ -262,7 +262,7 @@
           <a:p>
             <a:fld id="{780C659C-950C-4219-97A5-5FA1345B82CF}" type="datetimeFigureOut">
               <a:rPr lang="en-US" smtClean="0"/>
-              <a:t>4/29/2026</a:t>
+              <a:t>5/13/2026</a:t>
             </a:fld>
             <a:endParaRPr lang="en-US"/>
           </a:p>
@@ -460,7 +460,7 @@
           <a:p>
             <a:fld id="{780C659C-950C-4219-97A5-5FA1345B82CF}" type="datetimeFigureOut">
               <a:rPr lang="en-US" smtClean="0"/>
-              <a:t>4/29/2026</a:t>
+              <a:t>5/13/2026</a:t>
             </a:fld>
             <a:endParaRPr lang="en-US"/>
           </a:p>
@@ -668,7 +668,7 @@
           <a:p>
             <a:fld id="{780C659C-950C-4219-97A5-5FA1345B82CF}" type="datetimeFigureOut">
               <a:rPr lang="en-US" smtClean="0"/>
-              <a:t>4/29/2026</a:t>
+              <a:t>5/13/2026</a:t>
             </a:fld>
             <a:endParaRPr lang="en-US"/>
           </a:p>
@@ -866,7 +866,7 @@
           <a:p>
             <a:fld id="{780C659C-950C-4219-97A5-5FA1345B82CF}" type="datetimeFigureOut">
               <a:rPr lang="en-US" smtClean="0"/>
-              <a:t>4/29/2026</a:t>
+              <a:t>5/13/2026</a:t>
             </a:fld>
             <a:endParaRPr lang="en-US"/>
           </a:p>
@@ -1141,7 +1141,7 @@
           <a:p>
             <a:fld id="{780C659C-950C-4219-97A5-5FA1345B82CF}" type="datetimeFigureOut">
               <a:rPr lang="en-US" smtClean="0"/>
-              <a:t>4/29/2026</a:t>
+              <a:t>5/13/2026</a:t>
             </a:fld>
             <a:endParaRPr lang="en-US"/>
           </a:p>
@@ -1406,7 +1406,7 @@
           <a:p>
             <a:fld id="{780C659C-950C-4219-97A5-5FA1345B82CF}" type="datetimeFigureOut">
               <a:rPr lang="en-US" smtClean="0"/>
-              <a:t>4/29/2026</a:t>
+              <a:t>5/13/2026</a:t>
             </a:fld>
             <a:endParaRPr lang="en-US"/>
           </a:p>
@@ -1818,7 +1818,7 @@
           <a:p>
             <a:fld id="{780C659C-950C-4219-97A5-5FA1345B82CF}" type="datetimeFigureOut">
               <a:rPr lang="en-US" smtClean="0"/>
-              <a:t>4/29/2026</a:t>
+              <a:t>5/13/2026</a:t>
             </a:fld>
             <a:endParaRPr lang="en-US"/>
           </a:p>
@@ -1959,7 +1959,7 @@
           <a:p>
             <a:fld id="{780C659C-950C-4219-97A5-5FA1345B82CF}" type="datetimeFigureOut">
               <a:rPr lang="en-US" smtClean="0"/>
-              <a:t>4/29/2026</a:t>
+              <a:t>5/13/2026</a:t>
             </a:fld>
             <a:endParaRPr lang="en-US"/>
           </a:p>
@@ -2072,7 +2072,7 @@
           <a:p>
             <a:fld id="{780C659C-950C-4219-97A5-5FA1345B82CF}" type="datetimeFigureOut">
               <a:rPr lang="en-US" smtClean="0"/>
-              <a:t>4/29/2026</a:t>
+              <a:t>5/13/2026</a:t>
             </a:fld>
             <a:endParaRPr lang="en-US"/>
           </a:p>
@@ -2383,7 +2383,7 @@
           <a:p>
             <a:fld id="{780C659C-950C-4219-97A5-5FA1345B82CF}" type="datetimeFigureOut">
               <a:rPr lang="en-US" smtClean="0"/>
-              <a:t>4/29/2026</a:t>
+              <a:t>5/13/2026</a:t>
             </a:fld>
             <a:endParaRPr lang="en-US"/>
           </a:p>
@@ -2671,7 +2671,7 @@
           <a:p>
             <a:fld id="{780C659C-950C-4219-97A5-5FA1345B82CF}" type="datetimeFigureOut">
               <a:rPr lang="en-US" smtClean="0"/>
-              <a:t>4/29/2026</a:t>
+              <a:t>5/13/2026</a:t>
             </a:fld>
             <a:endParaRPr lang="en-US"/>
           </a:p>
@@ -2912,7 +2912,7 @@
           <a:p>
             <a:fld id="{780C659C-950C-4219-97A5-5FA1345B82CF}" type="datetimeFigureOut">
               <a:rPr lang="en-US" smtClean="0"/>
-              <a:t>4/29/2026</a:t>
+              <a:t>5/13/2026</a:t>
             </a:fld>
             <a:endParaRPr lang="en-US"/>
           </a:p>
@@ -3710,10 +3710,10 @@
       </p:grpSpPr>
       <p:pic>
         <p:nvPicPr>
-          <p:cNvPr id="4" name="Picture 3">
-            <a:extLst>
-              <a:ext uri="{FF2B5EF4-FFF2-40B4-BE49-F238E27FC236}">
-                <a16:creationId xmlns:a16="http://schemas.microsoft.com/office/drawing/2014/main" id="{04F00592-5251-3DB9-5152-8E27CBD5DE48}"/>
+          <p:cNvPr id="3" name="Picture 2">
+            <a:extLst>
+              <a:ext uri="{FF2B5EF4-FFF2-40B4-BE49-F238E27FC236}">
+                <a16:creationId xmlns:a16="http://schemas.microsoft.com/office/drawing/2014/main" id="{DC648B14-1001-DFA0-D7BB-CED618326AC0}"/>
               </a:ext>
             </a:extLst>
           </p:cNvPr>
@@ -3724,15 +3724,14 @@
         </p:nvPicPr>
         <p:blipFill>
           <a:blip r:embed="rId2"/>
-          <a:srcRect l="748" r="1553" b="3289"/>
           <a:stretch>
             <a:fillRect/>
           </a:stretch>
         </p:blipFill>
         <p:spPr>
           <a:xfrm>
-            <a:off x="2145792" y="112776"/>
-            <a:ext cx="7400544" cy="6632448"/>
+            <a:off x="2257510" y="0"/>
+            <a:ext cx="7676980" cy="6858000"/>
           </a:xfrm>
           <a:prstGeom prst="rect">
             <a:avLst/>
@@ -3777,10 +3776,10 @@
       </p:grpSpPr>
       <p:grpSp>
         <p:nvGrpSpPr>
-          <p:cNvPr id="16" name="Group 15">
-            <a:extLst>
-              <a:ext uri="{FF2B5EF4-FFF2-40B4-BE49-F238E27FC236}">
-                <a16:creationId xmlns:a16="http://schemas.microsoft.com/office/drawing/2014/main" id="{85591B07-5052-FCA9-F785-9C33A1866DA6}"/>
+          <p:cNvPr id="2" name="Group 1">
+            <a:extLst>
+              <a:ext uri="{FF2B5EF4-FFF2-40B4-BE49-F238E27FC236}">
+                <a16:creationId xmlns:a16="http://schemas.microsoft.com/office/drawing/2014/main" id="{2220C524-6FEF-CEDA-2612-F0D591BC2AB2}"/>
               </a:ext>
             </a:extLst>
           </p:cNvPr>
@@ -3789,18 +3788,18 @@
         </p:nvGrpSpPr>
         <p:grpSpPr>
           <a:xfrm>
-            <a:off x="2090056" y="197833"/>
-            <a:ext cx="7149004" cy="6462334"/>
-            <a:chOff x="2090056" y="197833"/>
-            <a:chExt cx="7149004" cy="6462334"/>
+            <a:off x="2062438" y="0"/>
+            <a:ext cx="7676980" cy="6858000"/>
+            <a:chOff x="2062438" y="0"/>
+            <a:chExt cx="7676980" cy="6858000"/>
           </a:xfrm>
         </p:grpSpPr>
         <p:pic>
           <p:nvPicPr>
-            <p:cNvPr id="15" name="Picture 14">
+            <p:cNvPr id="3" name="Picture 2">
               <a:extLst>
                 <a:ext uri="{FF2B5EF4-FFF2-40B4-BE49-F238E27FC236}">
-                  <a16:creationId xmlns:a16="http://schemas.microsoft.com/office/drawing/2014/main" id="{D2C5B4CD-1527-384A-C3E1-90899D07E093}"/>
+                  <a16:creationId xmlns:a16="http://schemas.microsoft.com/office/drawing/2014/main" id="{C1CC2AB7-7C69-CFB9-B760-B26F81842148}"/>
                 </a:ext>
               </a:extLst>
             </p:cNvPr>
@@ -3817,8 +3816,8 @@
           </p:blipFill>
           <p:spPr>
             <a:xfrm>
-              <a:off x="2090056" y="197833"/>
-              <a:ext cx="7149004" cy="6407015"/>
+              <a:off x="2062438" y="0"/>
+              <a:ext cx="7676980" cy="6858000"/>
             </a:xfrm>
             <a:prstGeom prst="rect">
               <a:avLst/>
@@ -3839,8 +3838,8 @@
           </p:nvSpPr>
           <p:spPr>
             <a:xfrm>
-              <a:off x="2090056" y="401076"/>
-              <a:ext cx="7149003" cy="163776"/>
+              <a:off x="2090056" y="252919"/>
+              <a:ext cx="7249016" cy="332297"/>
             </a:xfrm>
             <a:prstGeom prst="rect">
               <a:avLst/>
@@ -3892,7 +3891,7 @@
           <p:spPr>
             <a:xfrm>
               <a:off x="2090056" y="609600"/>
-              <a:ext cx="7149003" cy="202843"/>
+              <a:ext cx="7249016" cy="280416"/>
             </a:xfrm>
             <a:prstGeom prst="rect">
               <a:avLst/>
@@ -3943,8 +3942,8 @@
           </p:nvSpPr>
           <p:spPr>
             <a:xfrm>
-              <a:off x="2090056" y="836827"/>
-              <a:ext cx="7149003" cy="3735173"/>
+              <a:off x="2090056" y="902208"/>
+              <a:ext cx="7249016" cy="3669792"/>
             </a:xfrm>
             <a:prstGeom prst="rect">
               <a:avLst/>
@@ -3996,7 +3995,7 @@
           <p:spPr>
             <a:xfrm>
               <a:off x="2090056" y="4572000"/>
-              <a:ext cx="5322679" cy="2088167"/>
+              <a:ext cx="5468984" cy="2088167"/>
             </a:xfrm>
             <a:prstGeom prst="rect">
               <a:avLst/>
